--- a/templates/static/content/four_grid_green_nature.pptx
+++ b/templates/static/content/four_grid_green_nature.pptx
@@ -3163,6 +3163,1150 @@
             <a:r>
               <a:t>核心要点</a:t>
             </a:r>
+          </a:p>
+        </p:txBody>
+      </p:sp>
+      <p:sp>
+        <p:nvSpPr>
+          <p:cNvPr id="4" name="Rounded Rectangle 3"/>
+          <p:cNvSpPr/>
+          <p:nvPr/>
+        </p:nvSpPr>
+        <p:spPr>
+          <a:xfrm>
+            <a:off x="731520" y="1280160"/>
+            <a:ext cx="3657600" cy="2377440"/>
+          </a:xfrm>
+          <a:prstGeom prst="roundRect">
+            <a:avLst/>
+          </a:prstGeom>
+          <a:solidFill>
+            <a:srgbClr val="FFFFFF"/>
+          </a:solidFill>
+          <a:ln>
+            <a:noFill/>
+          </a:ln>
+        </p:spPr>
+        <p:style>
+          <a:lnRef idx="1">
+            <a:schemeClr val="accent1"/>
+          </a:lnRef>
+          <a:fillRef idx="3">
+            <a:schemeClr val="accent1"/>
+          </a:fillRef>
+          <a:effectRef idx="2">
+            <a:schemeClr val="accent1"/>
+          </a:effectRef>
+          <a:fontRef idx="minor">
+            <a:schemeClr val="lt1"/>
+          </a:fontRef>
+        </p:style>
+        <p:txBody>
+          <a:bodyPr rtlCol="0" anchor="ctr"/>
+          <a:lstStyle/>
+          <a:p>
+            <a:pPr algn="ctr"/>
+          </a:p>
+        </p:txBody>
+        <p:spPr>
+          <a:effectLst>
+            <a:outerShdw blurRad="76200" dist="25400" dir="5400000" algn="tl">
+              <a:srgbClr val="000000">
+                <a:alpha val="12000"/>
+              </a:srgbClr>
+            </a:outerShdw>
+          </a:effectLst>
+        </p:spPr>
+      </p:sp>
+      <p:sp>
+        <p:nvSpPr>
+          <p:cNvPr id="5" name="Rectangle 4"/>
+          <p:cNvSpPr/>
+          <p:nvPr/>
+        </p:nvSpPr>
+        <p:spPr>
+          <a:xfrm>
+            <a:off x="731520" y="1417320"/>
+            <a:ext cx="54864" cy="2103120"/>
+          </a:xfrm>
+          <a:prstGeom prst="rect">
+            <a:avLst/>
+          </a:prstGeom>
+          <a:solidFill>
+            <a:srgbClr val="2196F3"/>
+          </a:solidFill>
+          <a:ln>
+            <a:noFill/>
+          </a:ln>
+        </p:spPr>
+        <p:style>
+          <a:lnRef idx="1">
+            <a:schemeClr val="accent1"/>
+          </a:lnRef>
+          <a:fillRef idx="3">
+            <a:schemeClr val="accent1"/>
+          </a:fillRef>
+          <a:effectRef idx="2">
+            <a:schemeClr val="accent1"/>
+          </a:effectRef>
+          <a:fontRef idx="minor">
+            <a:schemeClr val="lt1"/>
+          </a:fontRef>
+        </p:style>
+        <p:txBody>
+          <a:bodyPr rtlCol="0" anchor="ctr"/>
+          <a:lstStyle/>
+          <a:p>
+            <a:pPr algn="ctr"/>
+          </a:p>
+        </p:txBody>
+      </p:sp>
+      <p:sp>
+        <p:nvSpPr>
+          <p:cNvPr id="6" name="Oval 5"/>
+          <p:cNvSpPr/>
+          <p:nvPr/>
+        </p:nvSpPr>
+        <p:spPr>
+          <a:xfrm>
+            <a:off x="1005840" y="1554480"/>
+            <a:ext cx="548640" cy="548640"/>
+          </a:xfrm>
+          <a:prstGeom prst="ellipse">
+            <a:avLst/>
+          </a:prstGeom>
+          <a:solidFill>
+            <a:srgbClr val="E3F2FD"/>
+          </a:solidFill>
+          <a:ln>
+            <a:noFill/>
+          </a:ln>
+        </p:spPr>
+        <p:style>
+          <a:lnRef idx="1">
+            <a:schemeClr val="accent1"/>
+          </a:lnRef>
+          <a:fillRef idx="3">
+            <a:schemeClr val="accent1"/>
+          </a:fillRef>
+          <a:effectRef idx="2">
+            <a:schemeClr val="accent1"/>
+          </a:effectRef>
+          <a:fontRef idx="minor">
+            <a:schemeClr val="lt1"/>
+          </a:fontRef>
+        </p:style>
+        <p:txBody>
+          <a:bodyPr rtlCol="0" anchor="ctr"/>
+          <a:lstStyle/>
+          <a:p>
+            <a:pPr algn="ctr"/>
+          </a:p>
+        </p:txBody>
+      </p:sp>
+      <p:sp>
+        <p:nvSpPr>
+          <p:cNvPr id="7" name="TextBox 6"/>
+          <p:cNvSpPr txBox="1"/>
+          <p:nvPr/>
+        </p:nvSpPr>
+        <p:spPr>
+          <a:xfrm>
+            <a:off x="1005840" y="1600200"/>
+            <a:ext cx="548640" cy="548640"/>
+          </a:xfrm>
+          <a:prstGeom prst="rect">
+            <a:avLst/>
+          </a:prstGeom>
+          <a:noFill/>
+        </p:spPr>
+        <p:txBody>
+          <a:bodyPr wrap="square">
+            <a:spAutoFit/>
+          </a:bodyPr>
+          <a:lstStyle/>
+          <a:p>
+            <a:pPr algn="ctr">
+              <a:defRPr sz="1800" b="1">
+                <a:solidFill>
+                  <a:srgbClr val="2196F3"/>
+                </a:solidFill>
+              </a:defRPr>
+            </a:pPr>
+            <a:r>
+              <a:t>01</a:t>
+            </a:r>
+          </a:p>
+        </p:txBody>
+      </p:sp>
+      <p:sp>
+        <p:nvSpPr>
+          <p:cNvPr id="8" name="TextBox 7"/>
+          <p:cNvSpPr txBox="1"/>
+          <p:nvPr/>
+        </p:nvSpPr>
+        <p:spPr>
+          <a:xfrm>
+            <a:off x="1737360" y="1554480"/>
+            <a:ext cx="2377440" cy="365760"/>
+          </a:xfrm>
+          <a:prstGeom prst="rect">
+            <a:avLst/>
+          </a:prstGeom>
+          <a:noFill/>
+        </p:spPr>
+        <p:txBody>
+          <a:bodyPr wrap="square">
+            <a:spAutoFit/>
+          </a:bodyPr>
+          <a:lstStyle/>
+          <a:p>
+            <a:pPr algn="l">
+              <a:defRPr sz="1600" b="1">
+                <a:solidFill>
+                  <a:srgbClr val="212121"/>
+                </a:solidFill>
+              </a:defRPr>
+            </a:pPr>
+            <a:r>
+              <a:t>市场分析</a:t>
+            </a:r>
+          </a:p>
+        </p:txBody>
+      </p:sp>
+      <p:sp>
+        <p:nvSpPr>
+          <p:cNvPr id="9" name="TextBox 8"/>
+          <p:cNvSpPr txBox="1"/>
+          <p:nvPr/>
+        </p:nvSpPr>
+        <p:spPr>
+          <a:xfrm>
+            <a:off x="1005840" y="2286000"/>
+            <a:ext cx="3108960" cy="1188720"/>
+          </a:xfrm>
+          <a:prstGeom prst="rect">
+            <a:avLst/>
+          </a:prstGeom>
+          <a:noFill/>
+        </p:spPr>
+        <p:txBody>
+          <a:bodyPr wrap="square">
+            <a:spAutoFit/>
+          </a:bodyPr>
+          <a:lstStyle/>
+          <a:p>
+            <a:pPr algn="l">
+              <a:defRPr sz="1100" b="0">
+                <a:solidFill>
+                  <a:srgbClr val="616161"/>
+                </a:solidFill>
+              </a:defRPr>
+            </a:pPr>
+            <a:r>
+              <a:t>行业规模、增速与竞争格局的系统性梳理。</a:t>
+            </a:r>
+          </a:p>
+        </p:txBody>
+      </p:sp>
+      <p:sp>
+        <p:nvSpPr>
+          <p:cNvPr id="10" name="Oval 9"/>
+          <p:cNvSpPr/>
+          <p:nvPr/>
+        </p:nvSpPr>
+        <p:spPr>
+          <a:xfrm>
+            <a:off x="3657600" y="2926080"/>
+            <a:ext cx="548640" cy="548640"/>
+          </a:xfrm>
+          <a:prstGeom prst="ellipse">
+            <a:avLst/>
+          </a:prstGeom>
+          <a:solidFill>
+            <a:srgbClr val="E3F2FD"/>
+          </a:solidFill>
+          <a:ln>
+            <a:noFill/>
+          </a:ln>
+        </p:spPr>
+        <p:style>
+          <a:lnRef idx="1">
+            <a:schemeClr val="accent1"/>
+          </a:lnRef>
+          <a:fillRef idx="3">
+            <a:schemeClr val="accent1"/>
+          </a:fillRef>
+          <a:effectRef idx="2">
+            <a:schemeClr val="accent1"/>
+          </a:effectRef>
+          <a:fontRef idx="minor">
+            <a:schemeClr val="lt1"/>
+          </a:fontRef>
+        </p:style>
+        <p:txBody>
+          <a:bodyPr rtlCol="0" anchor="ctr"/>
+          <a:lstStyle/>
+          <a:p>
+            <a:pPr algn="ctr"/>
+          </a:p>
+        </p:txBody>
+      </p:sp>
+      <p:sp>
+        <p:nvSpPr>
+          <p:cNvPr id="11" name="Rounded Rectangle 10"/>
+          <p:cNvSpPr/>
+          <p:nvPr/>
+        </p:nvSpPr>
+        <p:spPr>
+          <a:xfrm>
+            <a:off x="4754880" y="1280160"/>
+            <a:ext cx="3657600" cy="2377440"/>
+          </a:xfrm>
+          <a:prstGeom prst="roundRect">
+            <a:avLst/>
+          </a:prstGeom>
+          <a:solidFill>
+            <a:srgbClr val="FFFFFF"/>
+          </a:solidFill>
+          <a:ln>
+            <a:noFill/>
+          </a:ln>
+        </p:spPr>
+        <p:style>
+          <a:lnRef idx="1">
+            <a:schemeClr val="accent1"/>
+          </a:lnRef>
+          <a:fillRef idx="3">
+            <a:schemeClr val="accent1"/>
+          </a:fillRef>
+          <a:effectRef idx="2">
+            <a:schemeClr val="accent1"/>
+          </a:effectRef>
+          <a:fontRef idx="minor">
+            <a:schemeClr val="lt1"/>
+          </a:fontRef>
+        </p:style>
+        <p:txBody>
+          <a:bodyPr rtlCol="0" anchor="ctr"/>
+          <a:lstStyle/>
+          <a:p>
+            <a:pPr algn="ctr"/>
+          </a:p>
+        </p:txBody>
+        <p:spPr>
+          <a:effectLst>
+            <a:outerShdw blurRad="76200" dist="25400" dir="5400000" algn="tl">
+              <a:srgbClr val="000000">
+                <a:alpha val="12000"/>
+              </a:srgbClr>
+            </a:outerShdw>
+          </a:effectLst>
+        </p:spPr>
+      </p:sp>
+      <p:sp>
+        <p:nvSpPr>
+          <p:cNvPr id="12" name="Rectangle 11"/>
+          <p:cNvSpPr/>
+          <p:nvPr/>
+        </p:nvSpPr>
+        <p:spPr>
+          <a:xfrm>
+            <a:off x="4754880" y="1417320"/>
+            <a:ext cx="54864" cy="2103120"/>
+          </a:xfrm>
+          <a:prstGeom prst="rect">
+            <a:avLst/>
+          </a:prstGeom>
+          <a:solidFill>
+            <a:srgbClr val="4CAF50"/>
+          </a:solidFill>
+          <a:ln>
+            <a:noFill/>
+          </a:ln>
+        </p:spPr>
+        <p:style>
+          <a:lnRef idx="1">
+            <a:schemeClr val="accent1"/>
+          </a:lnRef>
+          <a:fillRef idx="3">
+            <a:schemeClr val="accent1"/>
+          </a:fillRef>
+          <a:effectRef idx="2">
+            <a:schemeClr val="accent1"/>
+          </a:effectRef>
+          <a:fontRef idx="minor">
+            <a:schemeClr val="lt1"/>
+          </a:fontRef>
+        </p:style>
+        <p:txBody>
+          <a:bodyPr rtlCol="0" anchor="ctr"/>
+          <a:lstStyle/>
+          <a:p>
+            <a:pPr algn="ctr"/>
+          </a:p>
+        </p:txBody>
+      </p:sp>
+      <p:sp>
+        <p:nvSpPr>
+          <p:cNvPr id="13" name="Oval 12"/>
+          <p:cNvSpPr/>
+          <p:nvPr/>
+        </p:nvSpPr>
+        <p:spPr>
+          <a:xfrm>
+            <a:off x="5029200" y="1554480"/>
+            <a:ext cx="548640" cy="548640"/>
+          </a:xfrm>
+          <a:prstGeom prst="ellipse">
+            <a:avLst/>
+          </a:prstGeom>
+          <a:solidFill>
+            <a:srgbClr val="E8F5E9"/>
+          </a:solidFill>
+          <a:ln>
+            <a:noFill/>
+          </a:ln>
+        </p:spPr>
+        <p:style>
+          <a:lnRef idx="1">
+            <a:schemeClr val="accent1"/>
+          </a:lnRef>
+          <a:fillRef idx="3">
+            <a:schemeClr val="accent1"/>
+          </a:fillRef>
+          <a:effectRef idx="2">
+            <a:schemeClr val="accent1"/>
+          </a:effectRef>
+          <a:fontRef idx="minor">
+            <a:schemeClr val="lt1"/>
+          </a:fontRef>
+        </p:style>
+        <p:txBody>
+          <a:bodyPr rtlCol="0" anchor="ctr"/>
+          <a:lstStyle/>
+          <a:p>
+            <a:pPr algn="ctr"/>
+          </a:p>
+        </p:txBody>
+      </p:sp>
+      <p:sp>
+        <p:nvSpPr>
+          <p:cNvPr id="14" name="TextBox 13"/>
+          <p:cNvSpPr txBox="1"/>
+          <p:nvPr/>
+        </p:nvSpPr>
+        <p:spPr>
+          <a:xfrm>
+            <a:off x="5029200" y="1600200"/>
+            <a:ext cx="548640" cy="548640"/>
+          </a:xfrm>
+          <a:prstGeom prst="rect">
+            <a:avLst/>
+          </a:prstGeom>
+          <a:noFill/>
+        </p:spPr>
+        <p:txBody>
+          <a:bodyPr wrap="square">
+            <a:spAutoFit/>
+          </a:bodyPr>
+          <a:lstStyle/>
+          <a:p>
+            <a:pPr algn="ctr">
+              <a:defRPr sz="1800" b="1">
+                <a:solidFill>
+                  <a:srgbClr val="4CAF50"/>
+                </a:solidFill>
+              </a:defRPr>
+            </a:pPr>
+            <a:r>
+              <a:t>02</a:t>
+            </a:r>
+          </a:p>
+        </p:txBody>
+      </p:sp>
+      <p:sp>
+        <p:nvSpPr>
+          <p:cNvPr id="15" name="TextBox 14"/>
+          <p:cNvSpPr txBox="1"/>
+          <p:nvPr/>
+        </p:nvSpPr>
+        <p:spPr>
+          <a:xfrm>
+            <a:off x="5760720" y="1554480"/>
+            <a:ext cx="2377440" cy="365760"/>
+          </a:xfrm>
+          <a:prstGeom prst="rect">
+            <a:avLst/>
+          </a:prstGeom>
+          <a:noFill/>
+        </p:spPr>
+        <p:txBody>
+          <a:bodyPr wrap="square">
+            <a:spAutoFit/>
+          </a:bodyPr>
+          <a:lstStyle/>
+          <a:p>
+            <a:pPr algn="l">
+              <a:defRPr sz="1600" b="1">
+                <a:solidFill>
+                  <a:srgbClr val="212121"/>
+                </a:solidFill>
+              </a:defRPr>
+            </a:pPr>
+            <a:r>
+              <a:t>产品设计</a:t>
+            </a:r>
+          </a:p>
+        </p:txBody>
+      </p:sp>
+      <p:sp>
+        <p:nvSpPr>
+          <p:cNvPr id="16" name="TextBox 15"/>
+          <p:cNvSpPr txBox="1"/>
+          <p:nvPr/>
+        </p:nvSpPr>
+        <p:spPr>
+          <a:xfrm>
+            <a:off x="5029200" y="2286000"/>
+            <a:ext cx="3108960" cy="1188720"/>
+          </a:xfrm>
+          <a:prstGeom prst="rect">
+            <a:avLst/>
+          </a:prstGeom>
+          <a:noFill/>
+        </p:spPr>
+        <p:txBody>
+          <a:bodyPr wrap="square">
+            <a:spAutoFit/>
+          </a:bodyPr>
+          <a:lstStyle/>
+          <a:p>
+            <a:pPr algn="l">
+              <a:defRPr sz="1100" b="0">
+                <a:solidFill>
+                  <a:srgbClr val="616161"/>
+                </a:solidFill>
+              </a:defRPr>
+            </a:pPr>
+            <a:r>
+              <a:t>核心功能定义、用户路径与交互原型。</a:t>
+            </a:r>
+          </a:p>
+        </p:txBody>
+      </p:sp>
+      <p:sp>
+        <p:nvSpPr>
+          <p:cNvPr id="17" name="Oval 16"/>
+          <p:cNvSpPr/>
+          <p:nvPr/>
+        </p:nvSpPr>
+        <p:spPr>
+          <a:xfrm>
+            <a:off x="7680960" y="2926080"/>
+            <a:ext cx="548640" cy="548640"/>
+          </a:xfrm>
+          <a:prstGeom prst="ellipse">
+            <a:avLst/>
+          </a:prstGeom>
+          <a:solidFill>
+            <a:srgbClr val="E8F5E9"/>
+          </a:solidFill>
+          <a:ln>
+            <a:noFill/>
+          </a:ln>
+        </p:spPr>
+        <p:style>
+          <a:lnRef idx="1">
+            <a:schemeClr val="accent1"/>
+          </a:lnRef>
+          <a:fillRef idx="3">
+            <a:schemeClr val="accent1"/>
+          </a:fillRef>
+          <a:effectRef idx="2">
+            <a:schemeClr val="accent1"/>
+          </a:effectRef>
+          <a:fontRef idx="minor">
+            <a:schemeClr val="lt1"/>
+          </a:fontRef>
+        </p:style>
+        <p:txBody>
+          <a:bodyPr rtlCol="0" anchor="ctr"/>
+          <a:lstStyle/>
+          <a:p>
+            <a:pPr algn="ctr"/>
+          </a:p>
+        </p:txBody>
+      </p:sp>
+      <p:sp>
+        <p:nvSpPr>
+          <p:cNvPr id="18" name="Rounded Rectangle 17"/>
+          <p:cNvSpPr/>
+          <p:nvPr/>
+        </p:nvSpPr>
+        <p:spPr>
+          <a:xfrm>
+            <a:off x="731520" y="4023360"/>
+            <a:ext cx="3657600" cy="2377440"/>
+          </a:xfrm>
+          <a:prstGeom prst="roundRect">
+            <a:avLst/>
+          </a:prstGeom>
+          <a:solidFill>
+            <a:srgbClr val="FFFFFF"/>
+          </a:solidFill>
+          <a:ln>
+            <a:noFill/>
+          </a:ln>
+        </p:spPr>
+        <p:style>
+          <a:lnRef idx="1">
+            <a:schemeClr val="accent1"/>
+          </a:lnRef>
+          <a:fillRef idx="3">
+            <a:schemeClr val="accent1"/>
+          </a:fillRef>
+          <a:effectRef idx="2">
+            <a:schemeClr val="accent1"/>
+          </a:effectRef>
+          <a:fontRef idx="minor">
+            <a:schemeClr val="lt1"/>
+          </a:fontRef>
+        </p:style>
+        <p:txBody>
+          <a:bodyPr rtlCol="0" anchor="ctr"/>
+          <a:lstStyle/>
+          <a:p>
+            <a:pPr algn="ctr"/>
+          </a:p>
+        </p:txBody>
+        <p:spPr>
+          <a:effectLst>
+            <a:outerShdw blurRad="76200" dist="25400" dir="5400000" algn="tl">
+              <a:srgbClr val="000000">
+                <a:alpha val="12000"/>
+              </a:srgbClr>
+            </a:outerShdw>
+          </a:effectLst>
+        </p:spPr>
+      </p:sp>
+      <p:sp>
+        <p:nvSpPr>
+          <p:cNvPr id="19" name="Rectangle 18"/>
+          <p:cNvSpPr/>
+          <p:nvPr/>
+        </p:nvSpPr>
+        <p:spPr>
+          <a:xfrm>
+            <a:off x="731520" y="4160520"/>
+            <a:ext cx="54864" cy="2103120"/>
+          </a:xfrm>
+          <a:prstGeom prst="rect">
+            <a:avLst/>
+          </a:prstGeom>
+          <a:solidFill>
+            <a:srgbClr val="FF9800"/>
+          </a:solidFill>
+          <a:ln>
+            <a:noFill/>
+          </a:ln>
+        </p:spPr>
+        <p:style>
+          <a:lnRef idx="1">
+            <a:schemeClr val="accent1"/>
+          </a:lnRef>
+          <a:fillRef idx="3">
+            <a:schemeClr val="accent1"/>
+          </a:fillRef>
+          <a:effectRef idx="2">
+            <a:schemeClr val="accent1"/>
+          </a:effectRef>
+          <a:fontRef idx="minor">
+            <a:schemeClr val="lt1"/>
+          </a:fontRef>
+        </p:style>
+        <p:txBody>
+          <a:bodyPr rtlCol="0" anchor="ctr"/>
+          <a:lstStyle/>
+          <a:p>
+            <a:pPr algn="ctr"/>
+          </a:p>
+        </p:txBody>
+      </p:sp>
+      <p:sp>
+        <p:nvSpPr>
+          <p:cNvPr id="20" name="Oval 19"/>
+          <p:cNvSpPr/>
+          <p:nvPr/>
+        </p:nvSpPr>
+        <p:spPr>
+          <a:xfrm>
+            <a:off x="1005840" y="4297680"/>
+            <a:ext cx="548640" cy="548640"/>
+          </a:xfrm>
+          <a:prstGeom prst="ellipse">
+            <a:avLst/>
+          </a:prstGeom>
+          <a:solidFill>
+            <a:srgbClr val="FFF3E0"/>
+          </a:solidFill>
+          <a:ln>
+            <a:noFill/>
+          </a:ln>
+        </p:spPr>
+        <p:style>
+          <a:lnRef idx="1">
+            <a:schemeClr val="accent1"/>
+          </a:lnRef>
+          <a:fillRef idx="3">
+            <a:schemeClr val="accent1"/>
+          </a:fillRef>
+          <a:effectRef idx="2">
+            <a:schemeClr val="accent1"/>
+          </a:effectRef>
+          <a:fontRef idx="minor">
+            <a:schemeClr val="lt1"/>
+          </a:fontRef>
+        </p:style>
+        <p:txBody>
+          <a:bodyPr rtlCol="0" anchor="ctr"/>
+          <a:lstStyle/>
+          <a:p>
+            <a:pPr algn="ctr"/>
+          </a:p>
+        </p:txBody>
+      </p:sp>
+      <p:sp>
+        <p:nvSpPr>
+          <p:cNvPr id="21" name="TextBox 20"/>
+          <p:cNvSpPr txBox="1"/>
+          <p:nvPr/>
+        </p:nvSpPr>
+        <p:spPr>
+          <a:xfrm>
+            <a:off x="1005840" y="4343400"/>
+            <a:ext cx="548640" cy="548640"/>
+          </a:xfrm>
+          <a:prstGeom prst="rect">
+            <a:avLst/>
+          </a:prstGeom>
+          <a:noFill/>
+        </p:spPr>
+        <p:txBody>
+          <a:bodyPr wrap="square">
+            <a:spAutoFit/>
+          </a:bodyPr>
+          <a:lstStyle/>
+          <a:p>
+            <a:pPr algn="ctr">
+              <a:defRPr sz="1800" b="1">
+                <a:solidFill>
+                  <a:srgbClr val="FF9800"/>
+                </a:solidFill>
+              </a:defRPr>
+            </a:pPr>
+            <a:r>
+              <a:t>03</a:t>
+            </a:r>
+          </a:p>
+        </p:txBody>
+      </p:sp>
+      <p:sp>
+        <p:nvSpPr>
+          <p:cNvPr id="22" name="TextBox 21"/>
+          <p:cNvSpPr txBox="1"/>
+          <p:nvPr/>
+        </p:nvSpPr>
+        <p:spPr>
+          <a:xfrm>
+            <a:off x="1737360" y="4297680"/>
+            <a:ext cx="2377440" cy="365760"/>
+          </a:xfrm>
+          <a:prstGeom prst="rect">
+            <a:avLst/>
+          </a:prstGeom>
+          <a:noFill/>
+        </p:spPr>
+        <p:txBody>
+          <a:bodyPr wrap="square">
+            <a:spAutoFit/>
+          </a:bodyPr>
+          <a:lstStyle/>
+          <a:p>
+            <a:pPr algn="l">
+              <a:defRPr sz="1600" b="1">
+                <a:solidFill>
+                  <a:srgbClr val="212121"/>
+                </a:solidFill>
+              </a:defRPr>
+            </a:pPr>
+            <a:r>
+              <a:t>技术方案</a:t>
+            </a:r>
+          </a:p>
+        </p:txBody>
+      </p:sp>
+      <p:sp>
+        <p:nvSpPr>
+          <p:cNvPr id="23" name="TextBox 22"/>
+          <p:cNvSpPr txBox="1"/>
+          <p:nvPr/>
+        </p:nvSpPr>
+        <p:spPr>
+          <a:xfrm>
+            <a:off x="1005840" y="5029200"/>
+            <a:ext cx="3108960" cy="1188720"/>
+          </a:xfrm>
+          <a:prstGeom prst="rect">
+            <a:avLst/>
+          </a:prstGeom>
+          <a:noFill/>
+        </p:spPr>
+        <p:txBody>
+          <a:bodyPr wrap="square">
+            <a:spAutoFit/>
+          </a:bodyPr>
+          <a:lstStyle/>
+          <a:p>
+            <a:pPr algn="l">
+              <a:defRPr sz="1100" b="0">
+                <a:solidFill>
+                  <a:srgbClr val="616161"/>
+                </a:solidFill>
+              </a:defRPr>
+            </a:pPr>
+            <a:r>
+              <a:t>架构分层、关键选型与性能预算。</a:t>
+            </a:r>
+          </a:p>
+        </p:txBody>
+      </p:sp>
+      <p:sp>
+        <p:nvSpPr>
+          <p:cNvPr id="24" name="Oval 23"/>
+          <p:cNvSpPr/>
+          <p:nvPr/>
+        </p:nvSpPr>
+        <p:spPr>
+          <a:xfrm>
+            <a:off x="3657600" y="5669280"/>
+            <a:ext cx="548640" cy="548640"/>
+          </a:xfrm>
+          <a:prstGeom prst="ellipse">
+            <a:avLst/>
+          </a:prstGeom>
+          <a:solidFill>
+            <a:srgbClr val="FFF3E0"/>
+          </a:solidFill>
+          <a:ln>
+            <a:noFill/>
+          </a:ln>
+        </p:spPr>
+        <p:style>
+          <a:lnRef idx="1">
+            <a:schemeClr val="accent1"/>
+          </a:lnRef>
+          <a:fillRef idx="3">
+            <a:schemeClr val="accent1"/>
+          </a:fillRef>
+          <a:effectRef idx="2">
+            <a:schemeClr val="accent1"/>
+          </a:effectRef>
+          <a:fontRef idx="minor">
+            <a:schemeClr val="lt1"/>
+          </a:fontRef>
+        </p:style>
+        <p:txBody>
+          <a:bodyPr rtlCol="0" anchor="ctr"/>
+          <a:lstStyle/>
+          <a:p>
+            <a:pPr algn="ctr"/>
+          </a:p>
+        </p:txBody>
+      </p:sp>
+      <p:sp>
+        <p:nvSpPr>
+          <p:cNvPr id="25" name="Rounded Rectangle 24"/>
+          <p:cNvSpPr/>
+          <p:nvPr/>
+        </p:nvSpPr>
+        <p:spPr>
+          <a:xfrm>
+            <a:off x="4754880" y="4023360"/>
+            <a:ext cx="3657600" cy="2377440"/>
+          </a:xfrm>
+          <a:prstGeom prst="roundRect">
+            <a:avLst/>
+          </a:prstGeom>
+          <a:solidFill>
+            <a:srgbClr val="FFFFFF"/>
+          </a:solidFill>
+          <a:ln>
+            <a:noFill/>
+          </a:ln>
+        </p:spPr>
+        <p:style>
+          <a:lnRef idx="1">
+            <a:schemeClr val="accent1"/>
+          </a:lnRef>
+          <a:fillRef idx="3">
+            <a:schemeClr val="accent1"/>
+          </a:fillRef>
+          <a:effectRef idx="2">
+            <a:schemeClr val="accent1"/>
+          </a:effectRef>
+          <a:fontRef idx="minor">
+            <a:schemeClr val="lt1"/>
+          </a:fontRef>
+        </p:style>
+        <p:txBody>
+          <a:bodyPr rtlCol="0" anchor="ctr"/>
+          <a:lstStyle/>
+          <a:p>
+            <a:pPr algn="ctr"/>
+          </a:p>
+        </p:txBody>
+        <p:spPr>
+          <a:effectLst>
+            <a:outerShdw blurRad="76200" dist="25400" dir="5400000" algn="tl">
+              <a:srgbClr val="000000">
+                <a:alpha val="12000"/>
+              </a:srgbClr>
+            </a:outerShdw>
+          </a:effectLst>
+        </p:spPr>
+      </p:sp>
+      <p:sp>
+        <p:nvSpPr>
+          <p:cNvPr id="26" name="Rectangle 25"/>
+          <p:cNvSpPr/>
+          <p:nvPr/>
+        </p:nvSpPr>
+        <p:spPr>
+          <a:xfrm>
+            <a:off x="4754880" y="4160520"/>
+            <a:ext cx="54864" cy="2103120"/>
+          </a:xfrm>
+          <a:prstGeom prst="rect">
+            <a:avLst/>
+          </a:prstGeom>
+          <a:solidFill>
+            <a:srgbClr val="E91E63"/>
+          </a:solidFill>
+          <a:ln>
+            <a:noFill/>
+          </a:ln>
+        </p:spPr>
+        <p:style>
+          <a:lnRef idx="1">
+            <a:schemeClr val="accent1"/>
+          </a:lnRef>
+          <a:fillRef idx="3">
+            <a:schemeClr val="accent1"/>
+          </a:fillRef>
+          <a:effectRef idx="2">
+            <a:schemeClr val="accent1"/>
+          </a:effectRef>
+          <a:fontRef idx="minor">
+            <a:schemeClr val="lt1"/>
+          </a:fontRef>
+        </p:style>
+        <p:txBody>
+          <a:bodyPr rtlCol="0" anchor="ctr"/>
+          <a:lstStyle/>
+          <a:p>
+            <a:pPr algn="ctr"/>
+          </a:p>
+        </p:txBody>
+      </p:sp>
+      <p:sp>
+        <p:nvSpPr>
+          <p:cNvPr id="27" name="Oval 26"/>
+          <p:cNvSpPr/>
+          <p:nvPr/>
+        </p:nvSpPr>
+        <p:spPr>
+          <a:xfrm>
+            <a:off x="5029200" y="4297680"/>
+            <a:ext cx="548640" cy="548640"/>
+          </a:xfrm>
+          <a:prstGeom prst="ellipse">
+            <a:avLst/>
+          </a:prstGeom>
+          <a:solidFill>
+            <a:srgbClr val="FCE4EC"/>
+          </a:solidFill>
+          <a:ln>
+            <a:noFill/>
+          </a:ln>
+        </p:spPr>
+        <p:style>
+          <a:lnRef idx="1">
+            <a:schemeClr val="accent1"/>
+          </a:lnRef>
+          <a:fillRef idx="3">
+            <a:schemeClr val="accent1"/>
+          </a:fillRef>
+          <a:effectRef idx="2">
+            <a:schemeClr val="accent1"/>
+          </a:effectRef>
+          <a:fontRef idx="minor">
+            <a:schemeClr val="lt1"/>
+          </a:fontRef>
+        </p:style>
+        <p:txBody>
+          <a:bodyPr rtlCol="0" anchor="ctr"/>
+          <a:lstStyle/>
+          <a:p>
+            <a:pPr algn="ctr"/>
+          </a:p>
+        </p:txBody>
+      </p:sp>
+      <p:sp>
+        <p:nvSpPr>
+          <p:cNvPr id="28" name="TextBox 27"/>
+          <p:cNvSpPr txBox="1"/>
+          <p:nvPr/>
+        </p:nvSpPr>
+        <p:spPr>
+          <a:xfrm>
+            <a:off x="5029200" y="4343400"/>
+            <a:ext cx="548640" cy="548640"/>
+          </a:xfrm>
+          <a:prstGeom prst="rect">
+            <a:avLst/>
+          </a:prstGeom>
+          <a:noFill/>
+        </p:spPr>
+        <p:txBody>
+          <a:bodyPr wrap="square">
+            <a:spAutoFit/>
+          </a:bodyPr>
+          <a:lstStyle/>
+          <a:p>
+            <a:pPr algn="ctr">
+              <a:defRPr sz="1800" b="1">
+                <a:solidFill>
+                  <a:srgbClr val="E91E63"/>
+                </a:solidFill>
+              </a:defRPr>
+            </a:pPr>
+            <a:r>
+              <a:t>04</a:t>
+            </a:r>
+          </a:p>
+        </p:txBody>
+      </p:sp>
+      <p:sp>
+        <p:nvSpPr>
+          <p:cNvPr id="29" name="TextBox 28"/>
+          <p:cNvSpPr txBox="1"/>
+          <p:nvPr/>
+        </p:nvSpPr>
+        <p:spPr>
+          <a:xfrm>
+            <a:off x="5760720" y="4297680"/>
+            <a:ext cx="2377440" cy="365760"/>
+          </a:xfrm>
+          <a:prstGeom prst="rect">
+            <a:avLst/>
+          </a:prstGeom>
+          <a:noFill/>
+        </p:spPr>
+        <p:txBody>
+          <a:bodyPr wrap="square">
+            <a:spAutoFit/>
+          </a:bodyPr>
+          <a:lstStyle/>
+          <a:p>
+            <a:pPr algn="l">
+              <a:defRPr sz="1600" b="1">
+                <a:solidFill>
+                  <a:srgbClr val="212121"/>
+                </a:solidFill>
+              </a:defRPr>
+            </a:pPr>
+            <a:r>
+              <a:t>运营计划</a:t>
+            </a:r>
+          </a:p>
+        </p:txBody>
+      </p:sp>
+      <p:sp>
+        <p:nvSpPr>
+          <p:cNvPr id="30" name="TextBox 29"/>
+          <p:cNvSpPr txBox="1"/>
+          <p:nvPr/>
+        </p:nvSpPr>
+        <p:spPr>
+          <a:xfrm>
+            <a:off x="5029200" y="5029200"/>
+            <a:ext cx="3108960" cy="1188720"/>
+          </a:xfrm>
+          <a:prstGeom prst="rect">
+            <a:avLst/>
+          </a:prstGeom>
+          <a:noFill/>
+        </p:spPr>
+        <p:txBody>
+          <a:bodyPr wrap="square">
+            <a:spAutoFit/>
+          </a:bodyPr>
+          <a:lstStyle/>
+          <a:p>
+            <a:pPr algn="l">
+              <a:defRPr sz="1100" b="0">
+                <a:solidFill>
+                  <a:srgbClr val="616161"/>
+                </a:solidFill>
+              </a:defRPr>
+            </a:pPr>
+            <a:r>
+              <a:t>渠道策略、节奏安排与效果度量。</a:t>
+            </a:r>
+          </a:p>
+        </p:txBody>
+      </p:sp>
+      <p:sp>
+        <p:nvSpPr>
+          <p:cNvPr id="31" name="Oval 30"/>
+          <p:cNvSpPr/>
+          <p:nvPr/>
+        </p:nvSpPr>
+        <p:spPr>
+          <a:xfrm>
+            <a:off x="7680960" y="5669280"/>
+            <a:ext cx="548640" cy="548640"/>
+          </a:xfrm>
+          <a:prstGeom prst="ellipse">
+            <a:avLst/>
+          </a:prstGeom>
+          <a:solidFill>
+            <a:srgbClr val="FCE4EC"/>
+          </a:solidFill>
+          <a:ln>
+            <a:noFill/>
+          </a:ln>
+        </p:spPr>
+        <p:style>
+          <a:lnRef idx="1">
+            <a:schemeClr val="accent1"/>
+          </a:lnRef>
+          <a:fillRef idx="3">
+            <a:schemeClr val="accent1"/>
+          </a:fillRef>
+          <a:effectRef idx="2">
+            <a:schemeClr val="accent1"/>
+          </a:effectRef>
+          <a:fontRef idx="minor">
+            <a:schemeClr val="lt1"/>
+          </a:fontRef>
+        </p:style>
+        <p:txBody>
+          <a:bodyPr rtlCol="0" anchor="ctr"/>
+          <a:lstStyle/>
+          <a:p>
+            <a:pPr algn="ctr"/>
           </a:p>
         </p:txBody>
       </p:sp>

--- a/templates/static/content/four_grid_green_nature.pptx
+++ b/templates/static/content/four_grid_green_nature.pptx
@@ -3233,7 +3233,7 @@
             <a:avLst/>
           </a:prstGeom>
           <a:solidFill>
-            <a:srgbClr val="2196F3"/>
+            <a:srgbClr val="2D6A4F"/>
           </a:solidFill>
           <a:ln>
             <a:noFill/>
@@ -3329,7 +3329,7 @@
             <a:pPr algn="ctr">
               <a:defRPr sz="1800" b="1">
                 <a:solidFill>
-                  <a:srgbClr val="2196F3"/>
+                  <a:srgbClr val="2D6A4F"/>
                 </a:solidFill>
               </a:defRPr>
             </a:pPr>
@@ -3519,7 +3519,7 @@
             <a:avLst/>
           </a:prstGeom>
           <a:solidFill>
-            <a:srgbClr val="4CAF50"/>
+            <a:srgbClr val="52B788"/>
           </a:solidFill>
           <a:ln>
             <a:noFill/>
@@ -3615,7 +3615,7 @@
             <a:pPr algn="ctr">
               <a:defRPr sz="1800" b="1">
                 <a:solidFill>
-                  <a:srgbClr val="4CAF50"/>
+                  <a:srgbClr val="52B788"/>
                 </a:solidFill>
               </a:defRPr>
             </a:pPr>
@@ -3805,7 +3805,7 @@
             <a:avLst/>
           </a:prstGeom>
           <a:solidFill>
-            <a:srgbClr val="FF9800"/>
+            <a:srgbClr val="A8DAB5"/>
           </a:solidFill>
           <a:ln>
             <a:noFill/>
@@ -3901,7 +3901,7 @@
             <a:pPr algn="ctr">
               <a:defRPr sz="1800" b="1">
                 <a:solidFill>
-                  <a:srgbClr val="FF9800"/>
+                  <a:srgbClr val="A8DAB5"/>
                 </a:solidFill>
               </a:defRPr>
             </a:pPr>
@@ -4091,7 +4091,7 @@
             <a:avLst/>
           </a:prstGeom>
           <a:solidFill>
-            <a:srgbClr val="E91E63"/>
+            <a:srgbClr val="9E9E9E"/>
           </a:solidFill>
           <a:ln>
             <a:noFill/>
@@ -4187,7 +4187,7 @@
             <a:pPr algn="ctr">
               <a:defRPr sz="1800" b="1">
                 <a:solidFill>
-                  <a:srgbClr val="E91E63"/>
+                  <a:srgbClr val="9E9E9E"/>
                 </a:solidFill>
               </a:defRPr>
             </a:pPr>
